--- a/docs/slides/pptx/M5-closing.pptx
+++ b/docs/slides/pptx/M5-closing.pptx
@@ -742,7 +742,7 @@
           </a:p>
           <a:p>
             <a:r>
-              <a:t>The full table lives in decision-framework.md: # · Feature · When to reach for this · Cost &amp; effort · The one-liner. (Paste the real table over this slide, or demo it from the repo.)</a:t>
+              <a:t>The full table lives in decision-framework.md: # · Feature · When · Think · Difficulty, the same three fields as every card today. (Paste the real table over this slide, or demo it from the repo.)</a:t>
             </a:r>
           </a:p>
           <a:p>
@@ -822,7 +822,7 @@
           </a:p>
           <a:p>
             <a:r>
-              <a:t>The full table lives in decision-framework.md: # · Feature · When to reach for this · Cost &amp; effort · The one-liner. (Paste the real table over this slide, or demo it from the repo.)</a:t>
+              <a:t>The full table lives in decision-framework.md: # · Feature · When · Think · Difficulty, the same three fields as every card today. (Paste the real table over this slide, or demo it from the repo.)</a:t>
             </a:r>
           </a:p>
           <a:p>
@@ -902,7 +902,7 @@
           </a:p>
           <a:p>
             <a:r>
-              <a:t>The full table lives in decision-framework.md: # · Feature · When to reach for this · Cost &amp; effort · The one-liner. (Paste the real table over this slide, or demo it from the repo.)</a:t>
+              <a:t>The full table lives in decision-framework.md: # · Feature · When · Think · Difficulty, the same three fields as every card today. (Paste the real table over this slide, or demo it from the repo.)</a:t>
             </a:r>
           </a:p>
           <a:p>
@@ -982,7 +982,7 @@
           </a:p>
           <a:p>
             <a:r>
-              <a:t>The full table lives in decision-framework.md: # · Feature · When to reach for this · Cost &amp; effort · The one-liner. (Paste the real table over this slide, or demo it from the repo.)</a:t>
+              <a:t>The full table lives in decision-framework.md: # · Feature · When · Think · Difficulty, the same three fields as every card today. (Paste the real table over this slide, or demo it from the repo.)</a:t>
             </a:r>
           </a:p>
           <a:p>
@@ -2612,7 +2612,7 @@
           </a:p>
           <a:p>
             <a:r>
-              <a:t>The full table lives in decision-framework.md: # · Feature · When to reach for this · Cost &amp; effort · The one-liner. (Paste the real table over this slide, or demo it from the repo.)</a:t>
+              <a:t>The full table lives in decision-framework.md: # · Feature · When · Think · Difficulty, the same three fields as every card today. (Paste the real table over this slide, or demo it from the repo.)</a:t>
             </a:r>
           </a:p>
           <a:p>
@@ -2692,7 +2692,7 @@
           </a:p>
           <a:p>
             <a:r>
-              <a:t>The full table lives in decision-framework.md: # · Feature · When to reach for this · Cost &amp; effort · The one-liner. (Paste the real table over this slide, or demo it from the repo.)</a:t>
+              <a:t>The full table lives in decision-framework.md: # · Feature · When · Think · Difficulty, the same three fields as every card today. (Paste the real table over this slide, or demo it from the repo.)</a:t>
             </a:r>
           </a:p>
           <a:p>
@@ -2772,7 +2772,7 @@
           </a:p>
           <a:p>
             <a:r>
-              <a:t>The full table lives in decision-framework.md: # · Feature · When to reach for this · Cost &amp; effort · The one-liner. (Paste the real table over this slide, or demo it from the repo.)</a:t>
+              <a:t>The full table lives in decision-framework.md: # · Feature · When · Think · Difficulty, the same three fields as every card today. (Paste the real table over this slide, or demo it from the repo.)</a:t>
             </a:r>
           </a:p>
           <a:p>
@@ -2852,7 +2852,7 @@
           </a:p>
           <a:p>
             <a:r>
-              <a:t>The full table lives in decision-framework.md: # · Feature · When to reach for this · Cost &amp; effort · The one-liner. (Paste the real table over this slide, or demo it from the repo.)</a:t>
+              <a:t>The full table lives in decision-framework.md: # · Feature · When · Think · Difficulty, the same three fields as every card today. (Paste the real table over this slide, or demo it from the repo.)</a:t>
             </a:r>
           </a:p>
           <a:p>
@@ -2932,7 +2932,7 @@
           </a:p>
           <a:p>
             <a:r>
-              <a:t>The full table lives in decision-framework.md: # · Feature · When to reach for this · Cost &amp; effort · The one-liner. (Paste the real table over this slide, or demo it from the repo.)</a:t>
+              <a:t>The full table lives in decision-framework.md: # · Feature · When · Think · Difficulty, the same three fields as every card today. (Paste the real table over this slide, or demo it from the repo.)</a:t>
             </a:r>
           </a:p>
           <a:p>
@@ -3012,7 +3012,7 @@
           </a:p>
           <a:p>
             <a:r>
-              <a:t>The full table lives in decision-framework.md: # · Feature · When to reach for this · Cost &amp; effort · The one-liner. (Paste the real table over this slide, or demo it from the repo.)</a:t>
+              <a:t>The full table lives in decision-framework.md: # · Feature · When · Think · Difficulty, the same three fields as every card today. (Paste the real table over this slide, or demo it from the repo.)</a:t>
             </a:r>
           </a:p>
           <a:p>

--- a/docs/slides/pptx/M5-closing.pptx
+++ b/docs/slides/pptx/M5-closing.pptx
@@ -737,17 +737,7 @@
           <a:lstStyle/>
           <a:p>
             <a:r>
-              <a:t>One cell per advance: name each feature as it lands, a few seconds apiece — the day, replayed in ten beats.</a:t>
-            </a:r>
-          </a:p>
-          <a:p>
-            <a:r>
-              <a:t>The full table lives in decision-framework.md: # · Feature · When · Think · Difficulty, the same three fields as every card today. (Paste the real table over this slide, or demo it from the repo.)</a:t>
-            </a:r>
-          </a:p>
-          <a:p>
-            <a:r>
-              <a:t>Don't read it. Let it sit on screen while you explain how to use it, which is the next section. It's dense on purpose; it's a reference, and they have it in the repo.</a:t>
+              <a:t>Route: the emergency at the top of its own queue, every run.</a:t>
             </a:r>
           </a:p>
         </p:txBody>
@@ -817,17 +807,7 @@
           <a:lstStyle/>
           <a:p>
             <a:r>
-              <a:t>One cell per advance: name each feature as it lands, a few seconds apiece — the day, replayed in ten beats.</a:t>
-            </a:r>
-          </a:p>
-          <a:p>
-            <a:r>
-              <a:t>The full table lives in decision-framework.md: # · Feature · When · Think · Difficulty, the same three fields as every card today. (Paste the real table over this slide, or demo it from the repo.)</a:t>
-            </a:r>
-          </a:p>
-          <a:p>
-            <a:r>
-              <a:t>Don't read it. Let it sit on screen while you explain how to use it, which is the next section. It's dense on purpose; it's a reference, and they have it in the repo.</a:t>
+              <a:t>Detect: the washout from three reports, not a one-star review.</a:t>
             </a:r>
           </a:p>
         </p:txBody>
@@ -897,17 +877,7 @@
           <a:lstStyle/>
           <a:p>
             <a:r>
-              <a:t>One cell per advance: name each feature as it lands, a few seconds apiece — the day, replayed in ten beats.</a:t>
-            </a:r>
-          </a:p>
-          <a:p>
-            <a:r>
-              <a:t>The full table lives in decision-framework.md: # · Feature · When · Think · Difficulty, the same three fields as every card today. (Paste the real table over this slide, or demo it from the repo.)</a:t>
-            </a:r>
-          </a:p>
-          <a:p>
-            <a:r>
-              <a:t>Don't read it. Let it sit on screen while you explain how to use it, which is the next section. It's dense on purpose; it's a reference, and they have it in the repo.</a:t>
+              <a:t>Approve: the model types, a person decides, the log proves it.</a:t>
             </a:r>
           </a:p>
         </p:txBody>
@@ -977,7 +947,7 @@
           <a:lstStyle/>
           <a:p>
             <a:r>
-              <a:t>One cell per advance: name each feature as it lands, a few seconds apiece — the day, replayed in ten beats.</a:t>
+              <a:t>Agent: the loop that planned the trip and checked the bridge.</a:t>
             </a:r>
           </a:p>
           <a:p>
@@ -1057,8 +1027,7 @@
           <a:lstStyle/>
           <a:p>
             <a:r>
-              <a:rPr dirty="0"/>
-              <a:t>A free local model matched the frontier model on ordinary reviews and lost only on the sarcastic ones. </a:t>
+              <a:t>A free local model matched the frontier model on ordinary reviews and lost only on the sarcastic ones.</a:t>
             </a:r>
           </a:p>
         </p:txBody>
@@ -1128,8 +1097,7 @@
           <a:lstStyle/>
           <a:p>
             <a:r>
-              <a:rPr dirty="0"/>
-              <a:t>Better chunking, not a bigger model, moved RAG's flagship question. </a:t>
+              <a:t>Better chunking, not a bigger model, moved RAG's flagship question.</a:t>
             </a:r>
           </a:p>
         </p:txBody>
@@ -1199,8 +1167,7 @@
           <a:lstStyle/>
           <a:p>
             <a:r>
-              <a:rPr dirty="0"/>
-              <a:t>The classifier caught both emergencies every run; the drafting model failed the emergency every run. </a:t>
+              <a:t>The classifier caught both emergencies every run; the drafting model failed the emergency every run.</a:t>
             </a:r>
           </a:p>
         </p:txBody>
@@ -1270,11 +1237,7 @@
           <a:lstStyle/>
           <a:p>
             <a:r>
-              <a:rPr dirty="0"/>
-              <a:t>The runs are checked in behind every </a:t>
-            </a:r>
-            <a:r>
-              <a:t>number.</a:t>
+              <a:t>The local agent reached all four planning tools in fewer than one run in five. That is why the capstone runs on a frontier model.</a:t>
             </a:r>
             <a:endParaRPr dirty="0"/>
           </a:p>
@@ -1345,7 +1308,7 @@
           <a:lstStyle/>
           <a:p>
             <a:r>
-              <a:t>A free local model matched the frontier model on ordinary reviews and lost only on the sarcastic ones. Better chunking, not a bigger model, moved RAG's flagship question. The classifier caught both emergencies every run; the drafting model failed the emergency every run. The runs are checked in behind every number.</a:t>
+              <a:t>The runs are checked in behind every number.</a:t>
             </a:r>
           </a:p>
           <a:p>
@@ -1495,7 +1458,7 @@
           <a:lstStyle/>
           <a:p>
             <a:r>
-              <a:t>Every feature today started with a stuck user, and the AI showed up as the answer rather than the premise.</a:t>
+              <a:t>Where we started this morning.</a:t>
             </a:r>
           </a:p>
         </p:txBody>
@@ -1635,12 +1598,7 @@
           <a:lstStyle/>
           <a:p>
             <a:r>
-              <a:t>Go down the column and mark every row that describes a problem your users actually have. The Row 0 exercise makes the features pick themselves.</a:t>
-            </a:r>
-          </a:p>
-          <a:p>
-            <a:r>
-              <a:t>This is the workshop's framing question turned into a Monday-morning exercise. It happens in a meeting room, not a codebase.</a:t>
+              <a:t>Go down the "when" column.</a:t>
             </a:r>
           </a:p>
         </p:txBody>
@@ -1710,12 +1668,7 @@
           <a:lstStyle/>
           <a:p>
             <a:r>
-              <a:t>Go down the column and mark every row that describes a problem your users actually have. The Row 0 exercise makes the features pick themselves.</a:t>
-            </a:r>
-          </a:p>
-          <a:p>
-            <a:r>
-              <a:t>This is the workshop's framing question turned into a Monday-morning exercise. It happens in a meeting room, not a codebase.</a:t>
+              <a:t>Mark every row that describes a problem your users actually have.</a:t>
             </a:r>
           </a:p>
         </p:txBody>
@@ -1785,7 +1738,7 @@
           <a:lstStyle/>
           <a:p>
             <a:r>
-              <a:t>Go down the column and mark every row that describes a problem your users actually have. The Row 0 exercise makes the features pick themselves.</a:t>
+              <a:t>Row 0 is the same exercise before any feature: list the ten things they hate doing, and the features pick themselves.</a:t>
             </a:r>
           </a:p>
           <a:p>
@@ -1860,12 +1813,7 @@
           <a:lstStyle/>
           <a:p>
             <a:r>
-              <a:t>Sort your marked rows by the cost column; the top of that list is the first feature, and the one-liner column is how you pitch it.</a:t>
-            </a:r>
-          </a:p>
-          <a:p>
-            <a:r>
-              <a:t>The local-model finding is worth repeating here; it changes the budget conversation before it starts.</a:t>
+              <a:t>Sort your marked rows by the difficulty column, easiest first; the top of that list is the first feature, and the Think column is how you pitch it.</a:t>
             </a:r>
           </a:p>
         </p:txBody>
@@ -1935,12 +1883,7 @@
           <a:lstStyle/>
           <a:p>
             <a:r>
-              <a:t>Sort your marked rows by the cost column; the top of that list is the first feature, and the one-liner column is how you pitch it.</a:t>
-            </a:r>
-          </a:p>
-          <a:p>
-            <a:r>
-              <a:t>The local-model finding is worth repeating here; it changes the budget conversation before it starts.</a:t>
+              <a:t>Rows 1 through 8 mostly run on free local models. Worth repeating here; it changes the budget conversation before it starts.</a:t>
             </a:r>
           </a:p>
         </p:txBody>
@@ -2010,7 +1953,7 @@
           <a:lstStyle/>
           <a:p>
             <a:r>
-              <a:t>Leading with the human-in-the-loop design is usually what gets the other rows approved.</a:t>
+              <a:t>Row 9 de-risks the rest. Leading with the human-in-the-loop design is usually what gets the other rows approved.</a:t>
             </a:r>
           </a:p>
         </p:txBody>
@@ -2080,7 +2023,7 @@
           <a:lstStyle/>
           <a:p>
             <a:r>
-              <a:t>Leading with the human-in-the-loop design is usually what gets the other rows approved.</a:t>
+              <a:t>Say where the human sits and what gets logged, before anyone asks.</a:t>
             </a:r>
           </a:p>
         </p:txBody>
@@ -2150,12 +2093,7 @@
           <a:lstStyle/>
           <a:p>
             <a:r>
-              <a:t>Lead with how often the problem happens. Say what it costs in days or weeks and what it costs to run; say what runs local and what needs a paid model, and why; say the labeled sample and the error you're tuning never to make.</a:t>
-            </a:r>
-          </a:p>
-          <a:p>
-            <a:r>
-              <a:t>This is the shape of the conversation the framework enables: a small, measurable, de-risked ask. Reference feature 03's recipe: labeled sample, run both, count disagreements, price the errors. It generalizes.</a:t>
+              <a:t>Lead with the user's problem in their words, and how often it happens.</a:t>
             </a:r>
           </a:p>
         </p:txBody>
@@ -2225,12 +2163,7 @@
           <a:lstStyle/>
           <a:p>
             <a:r>
-              <a:t>Lead with how often the problem happens. Say what it costs in days or weeks and what it costs to run; say what runs local and what needs a paid model, and why; say the labeled sample and the error you're tuning never to make.</a:t>
-            </a:r>
-          </a:p>
-          <a:p>
-            <a:r>
-              <a:t>This is the shape of the conversation the framework enables: a small, measurable, de-risked ask. Reference feature 03's recipe: labeled sample, run both, count disagreements, price the errors. It generalizes.</a:t>
+              <a:t>Name the row. Say what it costs in days or weeks and what it costs to run; say what runs local and what needs a paid model, and why.</a:t>
             </a:r>
           </a:p>
         </p:txBody>
@@ -2370,12 +2303,7 @@
           <a:lstStyle/>
           <a:p>
             <a:r>
-              <a:t>Lead with how often the problem happens. Say what it costs in days or weeks and what it costs to run; say what runs local and what needs a paid model, and why; say the labeled sample and the error you're tuning never to make.</a:t>
-            </a:r>
-          </a:p>
-          <a:p>
-            <a:r>
-              <a:t>This is the shape of the conversation the framework enables: a small, measurable, de-risked ask. Reference feature 03's recipe: labeled sample, run both, count disagreements, price the errors. It generalizes.</a:t>
+              <a:t>Say how you'll measure it: the labeled sample and the error you're tuning never to make. Reference feature 03's recipe: labeled sample, run both, count disagreements, price the errors. It generalizes.</a:t>
             </a:r>
           </a:p>
         </p:txBody>
@@ -2445,12 +2373,7 @@
           <a:lstStyle/>
           <a:p>
             <a:r>
-              <a:t>Lead with how often the problem happens. Say what it costs in days or weeks and what it costs to run; say what runs local and what needs a paid model, and why; say the labeled sample and the error you're tuning never to make.</a:t>
-            </a:r>
-          </a:p>
-          <a:p>
-            <a:r>
-              <a:t>This is the shape of the conversation the framework enables: a small, measurable, de-risked ask. Reference feature 03's recipe: labeled sample, run both, count disagreements, price the errors. It generalizes.</a:t>
+              <a:t>Ask for one feature. This is the shape of the conversation the framework enables: a small, measurable, de-risked ask.</a:t>
             </a:r>
           </a:p>
         </p:txBody>
@@ -2607,17 +2530,12 @@
           <a:lstStyle/>
           <a:p>
             <a:r>
-              <a:t>One cell per advance: name each feature as it lands, a few seconds apiece — the day, replayed in ten beats.</a:t>
-            </a:r>
-          </a:p>
-          <a:p>
-            <a:r>
-              <a:t>The full table lives in decision-framework.md: # · Feature · When · Think · Difficulty, the same three fields as every card today. (Paste the real table over this slide, or demo it from the repo.)</a:t>
-            </a:r>
-          </a:p>
-          <a:p>
-            <a:r>
-              <a:t>Don't read it. Let it sit on screen while you explain how to use it, which is the next section. It's dense on purpose; it's a reference, and they have it in the repo.</a:t>
+              <a:t>One cell per advance: name each feature as it lands, a few seconds apiece. The day, replayed in ten beats.</a:t>
+            </a:r>
+          </a:p>
+          <a:p>
+            <a:r>
+              <a:t>Summarize: the bridge surfaced from forty reports.</a:t>
             </a:r>
           </a:p>
         </p:txBody>
@@ -2687,17 +2605,7 @@
           <a:lstStyle/>
           <a:p>
             <a:r>
-              <a:t>One cell per advance: name each feature as it lands, a few seconds apiece — the day, replayed in ten beats.</a:t>
-            </a:r>
-          </a:p>
-          <a:p>
-            <a:r>
-              <a:t>The full table lives in decision-framework.md: # · Feature · When · Think · Difficulty, the same three fields as every card today. (Paste the real table over this slide, or demo it from the repo.)</a:t>
-            </a:r>
-          </a:p>
-          <a:p>
-            <a:r>
-              <a:t>Don't read it. Let it sit on screen while you explain how to use it, which is the next section. It's dense on purpose; it's a reference, and they have it in the repo.</a:t>
+              <a:t>Extract: a database row your code validated.</a:t>
             </a:r>
           </a:p>
         </p:txBody>
@@ -2767,17 +2675,7 @@
           <a:lstStyle/>
           <a:p>
             <a:r>
-              <a:t>One cell per advance: name each feature as it lands, a few seconds apiece — the day, replayed in ten beats.</a:t>
-            </a:r>
-          </a:p>
-          <a:p>
-            <a:r>
-              <a:t>The full table lives in decision-framework.md: # · Feature · When · Think · Difficulty, the same three fields as every card today. (Paste the real table over this slide, or demo it from the repo.)</a:t>
-            </a:r>
-          </a:p>
-          <a:p>
-            <a:r>
-              <a:t>Don't read it. Let it sit on screen while you explain how to use it, which is the next section. It's dense on purpose; it's a reference, and they have it in the repo.</a:t>
+              <a:t>Sentiment: measured, and the free model held on everything but sarcasm.</a:t>
             </a:r>
           </a:p>
         </p:txBody>
@@ -2847,17 +2745,7 @@
           <a:lstStyle/>
           <a:p>
             <a:r>
-              <a:t>One cell per advance: name each feature as it lands, a few seconds apiece — the day, replayed in ten beats.</a:t>
-            </a:r>
-          </a:p>
-          <a:p>
-            <a:r>
-              <a:t>The full table lives in decision-framework.md: # · Feature · When · Think · Difficulty, the same three fields as every card today. (Paste the real table over this slide, or demo it from the repo.)</a:t>
-            </a:r>
-          </a:p>
-          <a:p>
-            <a:r>
-              <a:t>Don't read it. Let it sit on screen while you explain how to use it, which is the next section. It's dense on purpose; it's a reference, and they have it in the repo.</a:t>
+              <a:t>Search: what users mean, not what they type.</a:t>
             </a:r>
           </a:p>
         </p:txBody>
@@ -2927,17 +2815,7 @@
           <a:lstStyle/>
           <a:p>
             <a:r>
-              <a:t>One cell per advance: name each feature as it lands, a few seconds apiece — the day, replayed in ten beats.</a:t>
-            </a:r>
-          </a:p>
-          <a:p>
-            <a:r>
-              <a:t>The full table lives in decision-framework.md: # · Feature · When · Think · Difficulty, the same three fields as every card today. (Paste the real table over this slide, or demo it from the repo.)</a:t>
-            </a:r>
-          </a:p>
-          <a:p>
-            <a:r>
-              <a:t>Don't read it. Let it sit on screen while you explain how to use it, which is the next section. It's dense on purpose; it's a reference, and they have it in the repo.</a:t>
+              <a:t>RAG: the campfire answer, cited, and the chunk boundary that nearly broke it.</a:t>
             </a:r>
           </a:p>
         </p:txBody>
@@ -3007,17 +2885,7 @@
           <a:lstStyle/>
           <a:p>
             <a:r>
-              <a:t>One cell per advance: name each feature as it lands, a few seconds apiece — the day, replayed in ten beats.</a:t>
-            </a:r>
-          </a:p>
-          <a:p>
-            <a:r>
-              <a:t>The full table lives in decision-framework.md: # · Feature · When · Think · Difficulty, the same three fields as every card today. (Paste the real table over this slide, or demo it from the repo.)</a:t>
-            </a:r>
-          </a:p>
-          <a:p>
-            <a:r>
-              <a:t>Don't read it. Let it sit on screen while you explain how to use it, which is the next section. It's dense on purpose; it's a reference, and they have it in the repo.</a:t>
+              <a:t>Recommend: more like this, and the daypack that taught you about complements.</a:t>
             </a:r>
           </a:p>
         </p:txBody>
